--- a/docs/proposal/KYC-NLI-Mid-Review.pptx
+++ b/docs/proposal/KYC-NLI-Mid-Review.pptx
@@ -946,7 +946,7 @@
           <a:p>
             <a:r>
               <a:rPr lang="en-US" dirty="0"/>
-              <a:t>Mid-review. Headline: we have a working system and a real empirical result that reframes the project's central claim.</a:t>
+              <a:t>Mid-review. Headline: a working system, a real empirical result with confidence intervals, and a reframed central claim.</a:t>
             </a:r>
             <a:endParaRPr lang="en-US" dirty="0"/>
           </a:p>
@@ -1826,7 +1826,7 @@
           <a:p>
             <a:r>
               <a:rPr lang="en-US" dirty="0"/>
-              <a:t>Showing you caught your own citation error is a credibility gain, not a loss.</a:t>
+              <a:t>Catching four of your own citation errors before a reviewer does is a credibility gain, not a loss. Say so plainly.</a:t>
             </a:r>
             <a:endParaRPr lang="en-US" dirty="0"/>
           </a:p>
@@ -5096,7 +5096,7 @@
                 <a:ea typeface="Calibri" pitchFamily="34" charset="-122"/>
                 <a:cs typeface="Calibri" pitchFamily="34" charset="-120"/>
               </a:rPr>
-              <a:t>Literature re-verified; 1 citation corrected</a:t>
+              <a:t>All 12 re-verified against source; 4 corrected</a:t>
             </a:r>
             <a:endParaRPr lang="en-US" sz="1300" dirty="0"/>
           </a:p>
@@ -5561,7 +5561,7 @@
                 <a:ea typeface="Calibri" pitchFamily="34" charset="-122"/>
                 <a:cs typeface="Calibri" pitchFamily="34" charset="-120"/>
               </a:rPr>
-              <a:t>4 noise conditions × 2 baselines × 5 languages</a:t>
+              <a:t>4 noise levels × 2 baselines × 5 languages, with CIs</a:t>
             </a:r>
             <a:endParaRPr lang="en-US" sz="1300" dirty="0"/>
           </a:p>
@@ -6777,7 +6777,7 @@
                 <a:ea typeface="Calibri" pitchFamily="34" charset="-122"/>
                 <a:cs typeface="Calibri" pitchFamily="34" charset="-120"/>
               </a:rPr>
-              <a:t>Macro-F1, per-language, per-phenomenon, contrast consistency, risk–coverage.</a:t>
+              <a:t>Macro-F1 with bootstrap CIs, paired significance testing, per-language, per-phenomenon.</a:t>
             </a:r>
             <a:endParaRPr lang="en-US" sz="1200" dirty="0"/>
           </a:p>
@@ -9933,7 +9933,7 @@
                 <a:ea typeface="Calibri" pitchFamily="34" charset="-122"/>
                 <a:cs typeface="Calibri" pitchFamily="34" charset="-120"/>
               </a:rPr>
-              <a:t>Contrast consistency 0.952 — the baseline is not gaming surface similarity.</a:t>
+              <a:t>Contrast consistency 0.952 — not gaming surface similarity.</a:t>
             </a:r>
             <a:endParaRPr lang="en-US" sz="1200" dirty="0"/>
           </a:p>
@@ -10000,7 +10000,7 @@
                 <a:ea typeface="Calibri" pitchFamily="34" charset="-122"/>
                 <a:cs typeface="Calibri" pitchFamily="34" charset="-120"/>
               </a:rPr>
-              <a:t>But it collapses under corruption: 0.980 → 0.649, review load 29% → 56%.</a:t>
+              <a:t>Collapses under corruption: 0.980 → 0.649 [0.602, 0.694], review load 29% → 56%.</a:t>
             </a:r>
             <a:endParaRPr lang="en-US" sz="1200" dirty="0"/>
           </a:p>
@@ -10008,7 +10008,74 @@
       </p:sp>
       <p:sp>
         <p:nvSpPr>
-          <p:cNvPr id="15" name="Text 12"/>
+          <p:cNvPr id="15" name="Shape 12"/>
+          <p:cNvSpPr/>
+          <p:nvPr/>
+        </p:nvSpPr>
+        <p:spPr>
+          <a:xfrm>
+            <a:off x="7589520" y="5605272"/>
+            <a:ext cx="64008" cy="64008"/>
+          </a:xfrm>
+          <a:prstGeom prst="rect">
+            <a:avLst/>
+          </a:prstGeom>
+          <a:solidFill>
+            <a:srgbClr val="E0873A"/>
+          </a:solidFill>
+          <a:ln w="12700">
+            <a:solidFill>
+              <a:srgbClr val="E0873A"/>
+            </a:solidFill>
+            <a:prstDash val="solid"/>
+          </a:ln>
+        </p:spPr>
+      </p:sp>
+      <p:sp>
+        <p:nvSpPr>
+          <p:cNvPr id="16" name="Text 13"/>
+          <p:cNvSpPr txBox="1"/>
+          <p:nvPr/>
+        </p:nvSpPr>
+        <p:spPr>
+          <a:xfrm>
+            <a:off x="7818120" y="5541264"/>
+            <a:ext cx="3794760" cy="566928"/>
+          </a:xfrm>
+          <a:prstGeom prst="rect">
+            <a:avLst/>
+          </a:prstGeom>
+          <a:noFill/>
+          <a:ln/>
+        </p:spPr>
+        <p:txBody>
+          <a:bodyPr wrap="square" lIns="0" tIns="0" rIns="0" bIns="0" rtlCol="0" anchor="ctr"/>
+          <a:lstStyle/>
+          <a:p>
+            <a:pPr indent="0" marL="0">
+              <a:lnSpc>
+                <a:spcPts val="1500"/>
+              </a:lnSpc>
+              <a:buNone/>
+            </a:pPr>
+            <a:r>
+              <a:rPr lang="en-US" sz="1200" dirty="0">
+                <a:solidFill>
+                  <a:srgbClr val="6B7280"/>
+                </a:solidFill>
+                <a:latin typeface="Calibri" pitchFamily="34" charset="0"/>
+                <a:ea typeface="Calibri" pitchFamily="34" charset="-122"/>
+                <a:cs typeface="Calibri" pitchFamily="34" charset="-120"/>
+              </a:rPr>
+              <a:t>Every difference significant under a paired bootstrap, 1000 resamples.</a:t>
+            </a:r>
+            <a:endParaRPr lang="en-US" sz="1200" dirty="0"/>
+          </a:p>
+        </p:txBody>
+      </p:sp>
+      <p:sp>
+        <p:nvSpPr>
+          <p:cNvPr id="17" name="Text 14"/>
           <p:cNvSpPr txBox="1"/>
           <p:nvPr/>
         </p:nvSpPr>
@@ -10039,7 +10106,7 @@
                 <a:ea typeface="Calibri" pitchFamily="34" charset="-122"/>
                 <a:cs typeface="Calibri" pitchFamily="34" charset="-120"/>
               </a:rPr>
-              <a:t>5 languages × 120 identities, seed 20260906. Reproduce: scripts/run_noise_ablation.ps1</a:t>
+              <a:t>5 languages × 120 identities, seed 20260906. Intervals: percentile bootstrap, 1000 resamples over CONTRAST GROUPS — resampling instances would treat correlated observations as independent and give intervals ~7% too narrow. Reproduce: scripts/run_noise_ablation.ps1</a:t>
             </a:r>
             <a:endParaRPr lang="en-US" sz="900" dirty="0"/>
           </a:p>
@@ -10464,7 +10531,7 @@
                 <a:ea typeface="Calibri" pitchFamily="34" charset="-122"/>
                 <a:cs typeface="Calibri" pitchFamily="34" charset="-120"/>
               </a:rPr>
-              <a:t>Stands or falls on the risk–coverage curve. We can state now what result would kill it.</a:t>
+              <a:t>Stands or falls on the risk–coverage curve, with the rule engine's CI as the bar to clear.</a:t>
             </a:r>
             <a:endParaRPr lang="en-US" sz="1150" dirty="0"/>
           </a:p>
@@ -10931,7 +10998,7 @@
                 <a:ea typeface="Calibri" pitchFamily="34" charset="-122"/>
                 <a:cs typeface="Calibri" pitchFamily="34" charset="-120"/>
               </a:rPr>
-              <a:t>Every citation in the Review 1 deck was checked against the published source. Eleven hold. One does not.</a:t>
+              <a:t>All 12 references checked against the published record. Four needed substantive correction — two of them errors a reviewer would have found first.</a:t>
             </a:r>
             <a:endParaRPr lang="en-US" sz="1400" dirty="0"/>
           </a:p>
@@ -10946,11 +11013,11 @@
         <p:spPr>
           <a:xfrm>
             <a:off x="548640" y="1783080"/>
-            <a:ext cx="11064240" cy="2286000"/>
+            <a:ext cx="11064240" cy="2331720"/>
           </a:xfrm>
           <a:prstGeom prst="roundRect">
             <a:avLst>
-              <a:gd name="adj" fmla="val 2400"/>
+              <a:gd name="adj" fmla="val 2353"/>
             </a:avLst>
           </a:prstGeom>
           <a:solidFill>
@@ -10972,8 +11039,8 @@
         </p:nvSpPr>
         <p:spPr>
           <a:xfrm>
-            <a:off x="822960" y="1965960"/>
-            <a:ext cx="10515600" cy="320040"/>
+            <a:off x="822960" y="1938528"/>
+            <a:ext cx="10515600" cy="292608"/>
           </a:xfrm>
           <a:prstGeom prst="rect">
             <a:avLst/>
@@ -10997,7 +11064,7 @@
                 <a:ea typeface="Cambria" pitchFamily="34" charset="-122"/>
                 <a:cs typeface="Cambria" pitchFamily="34" charset="-120"/>
               </a:rPr>
-              <a:t>Correction — FakeIDet2 (Paper 1 of 12)</a:t>
+              <a:t>Corrected</a:t>
             </a:r>
             <a:endParaRPr lang="en-US" sz="1500" dirty="0"/>
           </a:p>
@@ -11012,23 +11079,101 @@
         <p:spPr>
           <a:xfrm>
             <a:off x="868680" y="2331720"/>
-            <a:ext cx="10424160" cy="201168"/>
-          </a:xfrm>
-          <a:prstGeom prst="rect">
-            <a:avLst/>
-          </a:prstGeom>
-          <a:noFill/>
-          <a:ln/>
-        </p:spPr>
-        <p:txBody>
-          <a:bodyPr wrap="square" lIns="0" tIns="0" rIns="0" bIns="0" rtlCol="0" anchor="ctr"/>
-          <a:lstStyle/>
-          <a:p>
-            <a:pPr indent="0" marL="0">
-              <a:buNone/>
-            </a:pPr>
-            <a:r>
-              <a:rPr lang="en-US" sz="1000" b="1" spc="100" kern="0" dirty="0">
+            <a:ext cx="2468880" cy="365760"/>
+          </a:xfrm>
+          <a:prstGeom prst="rect">
+            <a:avLst/>
+          </a:prstGeom>
+          <a:noFill/>
+          <a:ln/>
+        </p:spPr>
+        <p:txBody>
+          <a:bodyPr wrap="square" lIns="0" tIns="0" rIns="0" bIns="0" rtlCol="0" anchor="ctr"/>
+          <a:lstStyle/>
+          <a:p>
+            <a:pPr indent="0" marL="0">
+              <a:buNone/>
+            </a:pPr>
+            <a:r>
+              <a:rPr lang="en-US" sz="1250" b="1" dirty="0">
+                <a:solidFill>
+                  <a:srgbClr val="16233D"/>
+                </a:solidFill>
+                <a:latin typeface="Calibri" pitchFamily="34" charset="0"/>
+                <a:ea typeface="Calibri" pitchFamily="34" charset="-122"/>
+                <a:cs typeface="Calibri" pitchFamily="34" charset="-120"/>
+              </a:rPr>
+              <a:t>FakeIDet2</a:t>
+            </a:r>
+            <a:endParaRPr lang="en-US" sz="1250" dirty="0"/>
+          </a:p>
+        </p:txBody>
+      </p:sp>
+      <p:sp>
+        <p:nvSpPr>
+          <p:cNvPr id="8" name="Text 6"/>
+          <p:cNvSpPr txBox="1"/>
+          <p:nvPr/>
+        </p:nvSpPr>
+        <p:spPr>
+          <a:xfrm>
+            <a:off x="3337560" y="2331720"/>
+            <a:ext cx="1005840" cy="365760"/>
+          </a:xfrm>
+          <a:prstGeom prst="rect">
+            <a:avLst/>
+          </a:prstGeom>
+          <a:noFill/>
+          <a:ln/>
+        </p:spPr>
+        <p:txBody>
+          <a:bodyPr wrap="square" lIns="0" tIns="0" rIns="0" bIns="0" rtlCol="0" anchor="ctr"/>
+          <a:lstStyle/>
+          <a:p>
+            <a:pPr indent="0" marL="0">
+              <a:buNone/>
+            </a:pPr>
+            <a:r>
+              <a:rPr lang="en-US" sz="1000" b="1" dirty="0">
+                <a:solidFill>
+                  <a:srgbClr val="B23A48"/>
+                </a:solidFill>
+                <a:latin typeface="Calibri" pitchFamily="34" charset="0"/>
+                <a:ea typeface="Calibri" pitchFamily="34" charset="-122"/>
+                <a:cs typeface="Calibri" pitchFamily="34" charset="-120"/>
+              </a:rPr>
+              <a:t>numbers</a:t>
+            </a:r>
+            <a:endParaRPr lang="en-US" sz="1000" dirty="0"/>
+          </a:p>
+        </p:txBody>
+      </p:sp>
+      <p:sp>
+        <p:nvSpPr>
+          <p:cNvPr id="9" name="Text 7"/>
+          <p:cNvSpPr txBox="1"/>
+          <p:nvPr/>
+        </p:nvSpPr>
+        <p:spPr>
+          <a:xfrm>
+            <a:off x="4434840" y="2331720"/>
+            <a:ext cx="7040880" cy="365760"/>
+          </a:xfrm>
+          <a:prstGeom prst="rect">
+            <a:avLst/>
+          </a:prstGeom>
+          <a:noFill/>
+          <a:ln/>
+        </p:spPr>
+        <p:txBody>
+          <a:bodyPr wrap="square" lIns="0" tIns="0" rIns="0" bIns="0" rtlCol="0" anchor="ctr"/>
+          <a:lstStyle/>
+          <a:p>
+            <a:pPr indent="0" marL="0">
+              <a:buNone/>
+            </a:pPr>
+            <a:r>
+              <a:rPr lang="en-US" sz="1200" dirty="0">
                 <a:solidFill>
                   <a:srgbClr val="6B7280"/>
                 </a:solidFill>
@@ -11036,7 +11181,85 @@
                 <a:ea typeface="Calibri" pitchFamily="34" charset="-122"/>
                 <a:cs typeface="Calibri" pitchFamily="34" charset="-120"/>
               </a:rPr>
-              <a:t>Field                    Deck says                    Source says</a:t>
+              <a:t>Year 2026 → 2025, and four wrong EER figures</a:t>
+            </a:r>
+            <a:endParaRPr lang="en-US" sz="1200" dirty="0"/>
+          </a:p>
+        </p:txBody>
+      </p:sp>
+      <p:sp>
+        <p:nvSpPr>
+          <p:cNvPr id="10" name="Text 8"/>
+          <p:cNvSpPr txBox="1"/>
+          <p:nvPr/>
+        </p:nvSpPr>
+        <p:spPr>
+          <a:xfrm>
+            <a:off x="868680" y="2752344"/>
+            <a:ext cx="2468880" cy="365760"/>
+          </a:xfrm>
+          <a:prstGeom prst="rect">
+            <a:avLst/>
+          </a:prstGeom>
+          <a:noFill/>
+          <a:ln/>
+        </p:spPr>
+        <p:txBody>
+          <a:bodyPr wrap="square" lIns="0" tIns="0" rIns="0" bIns="0" rtlCol="0" anchor="ctr"/>
+          <a:lstStyle/>
+          <a:p>
+            <a:pPr indent="0" marL="0">
+              <a:buNone/>
+            </a:pPr>
+            <a:r>
+              <a:rPr lang="en-US" sz="1250" b="1" dirty="0">
+                <a:solidFill>
+                  <a:srgbClr val="16233D"/>
+                </a:solidFill>
+                <a:latin typeface="Calibri" pitchFamily="34" charset="0"/>
+                <a:ea typeface="Calibri" pitchFamily="34" charset="-122"/>
+                <a:cs typeface="Calibri" pitchFamily="34" charset="-120"/>
+              </a:rPr>
+              <a:t>Adam &amp; Kliegr</a:t>
+            </a:r>
+            <a:endParaRPr lang="en-US" sz="1250" dirty="0"/>
+          </a:p>
+        </p:txBody>
+      </p:sp>
+      <p:sp>
+        <p:nvSpPr>
+          <p:cNvPr id="11" name="Text 9"/>
+          <p:cNvSpPr txBox="1"/>
+          <p:nvPr/>
+        </p:nvSpPr>
+        <p:spPr>
+          <a:xfrm>
+            <a:off x="3337560" y="2752344"/>
+            <a:ext cx="1005840" cy="365760"/>
+          </a:xfrm>
+          <a:prstGeom prst="rect">
+            <a:avLst/>
+          </a:prstGeom>
+          <a:noFill/>
+          <a:ln/>
+        </p:spPr>
+        <p:txBody>
+          <a:bodyPr wrap="square" lIns="0" tIns="0" rIns="0" bIns="0" rtlCol="0" anchor="ctr"/>
+          <a:lstStyle/>
+          <a:p>
+            <a:pPr indent="0" marL="0">
+              <a:buNone/>
+            </a:pPr>
+            <a:r>
+              <a:rPr lang="en-US" sz="1000" b="1" dirty="0">
+                <a:solidFill>
+                  <a:srgbClr val="B23A48"/>
+                </a:solidFill>
+                <a:latin typeface="Calibri" pitchFamily="34" charset="0"/>
+                <a:ea typeface="Calibri" pitchFamily="34" charset="-122"/>
+                <a:cs typeface="Calibri" pitchFamily="34" charset="-120"/>
+              </a:rPr>
+              <a:t>venue</a:t>
             </a:r>
             <a:endParaRPr lang="en-US" sz="1000" dirty="0"/>
           </a:p>
@@ -11044,30 +11267,69 @@
       </p:sp>
       <p:sp>
         <p:nvSpPr>
-          <p:cNvPr id="8" name="Text 6"/>
-          <p:cNvSpPr txBox="1"/>
-          <p:nvPr/>
-        </p:nvSpPr>
-        <p:spPr>
-          <a:xfrm>
-            <a:off x="868680" y="2560320"/>
-            <a:ext cx="3017520" cy="256032"/>
-          </a:xfrm>
-          <a:prstGeom prst="rect">
-            <a:avLst/>
-          </a:prstGeom>
-          <a:noFill/>
-          <a:ln/>
-        </p:spPr>
-        <p:txBody>
-          <a:bodyPr wrap="square" lIns="0" tIns="0" rIns="0" bIns="0" rtlCol="0" anchor="ctr"/>
-          <a:lstStyle/>
-          <a:p>
-            <a:pPr indent="0" marL="0">
-              <a:buNone/>
-            </a:pPr>
-            <a:r>
-              <a:rPr lang="en-US" sz="1150" dirty="0">
+          <p:cNvPr id="12" name="Text 10"/>
+          <p:cNvSpPr txBox="1"/>
+          <p:nvPr/>
+        </p:nvSpPr>
+        <p:spPr>
+          <a:xfrm>
+            <a:off x="4434840" y="2752344"/>
+            <a:ext cx="7040880" cy="365760"/>
+          </a:xfrm>
+          <a:prstGeom prst="rect">
+            <a:avLst/>
+          </a:prstGeom>
+          <a:noFill/>
+          <a:ln/>
+        </p:spPr>
+        <p:txBody>
+          <a:bodyPr wrap="square" lIns="0" tIns="0" rIns="0" bIns="0" rtlCol="0" anchor="ctr"/>
+          <a:lstStyle/>
+          <a:p>
+            <a:pPr indent="0" marL="0">
+              <a:buNone/>
+            </a:pPr>
+            <a:r>
+              <a:rPr lang="en-US" sz="1200" dirty="0">
+                <a:solidFill>
+                  <a:srgbClr val="6B7280"/>
+                </a:solidFill>
+                <a:latin typeface="Calibri" pitchFamily="34" charset="0"/>
+                <a:ea typeface="Calibri" pitchFamily="34" charset="-122"/>
+                <a:cs typeface="Calibri" pitchFamily="34" charset="-120"/>
+              </a:rPr>
+              <a:t>Cited as a 2024 preprint — it is an IPM 2025 journal paper</a:t>
+            </a:r>
+            <a:endParaRPr lang="en-US" sz="1200" dirty="0"/>
+          </a:p>
+        </p:txBody>
+      </p:sp>
+      <p:sp>
+        <p:nvSpPr>
+          <p:cNvPr id="13" name="Text 11"/>
+          <p:cNvSpPr txBox="1"/>
+          <p:nvPr/>
+        </p:nvSpPr>
+        <p:spPr>
+          <a:xfrm>
+            <a:off x="868680" y="3172968"/>
+            <a:ext cx="2468880" cy="365760"/>
+          </a:xfrm>
+          <a:prstGeom prst="rect">
+            <a:avLst/>
+          </a:prstGeom>
+          <a:noFill/>
+          <a:ln/>
+        </p:spPr>
+        <p:txBody>
+          <a:bodyPr wrap="square" lIns="0" tIns="0" rIns="0" bIns="0" rtlCol="0" anchor="ctr"/>
+          <a:lstStyle/>
+          <a:p>
+            <a:pPr indent="0" marL="0">
+              <a:buNone/>
+            </a:pPr>
+            <a:r>
+              <a:rPr lang="en-US" sz="1250" b="1" dirty="0">
                 <a:solidFill>
                   <a:srgbClr val="16233D"/>
                 </a:solidFill>
@@ -11075,38 +11337,38 @@
                 <a:ea typeface="Calibri" pitchFamily="34" charset="-122"/>
                 <a:cs typeface="Calibri" pitchFamily="34" charset="-120"/>
               </a:rPr>
-              <a:t>Year</a:t>
-            </a:r>
-            <a:endParaRPr lang="en-US" sz="1150" dirty="0"/>
-          </a:p>
-        </p:txBody>
-      </p:sp>
-      <p:sp>
-        <p:nvSpPr>
-          <p:cNvPr id="9" name="Text 7"/>
-          <p:cNvSpPr txBox="1"/>
-          <p:nvPr/>
-        </p:nvSpPr>
-        <p:spPr>
-          <a:xfrm>
-            <a:off x="3977640" y="2560320"/>
-            <a:ext cx="3017520" cy="256032"/>
-          </a:xfrm>
-          <a:prstGeom prst="rect">
-            <a:avLst/>
-          </a:prstGeom>
-          <a:noFill/>
-          <a:ln/>
-        </p:spPr>
-        <p:txBody>
-          <a:bodyPr wrap="square" lIns="0" tIns="0" rIns="0" bIns="0" rtlCol="0" anchor="ctr"/>
-          <a:lstStyle/>
-          <a:p>
-            <a:pPr indent="0" marL="0">
-              <a:buNone/>
-            </a:pPr>
-            <a:r>
-              <a:rPr lang="en-US" sz="1150" strike="sngStrike" dirty="0">
+              <a:t>Marchesin et al.</a:t>
+            </a:r>
+            <a:endParaRPr lang="en-US" sz="1250" dirty="0"/>
+          </a:p>
+        </p:txBody>
+      </p:sp>
+      <p:sp>
+        <p:nvSpPr>
+          <p:cNvPr id="14" name="Text 12"/>
+          <p:cNvSpPr txBox="1"/>
+          <p:nvPr/>
+        </p:nvSpPr>
+        <p:spPr>
+          <a:xfrm>
+            <a:off x="3337560" y="3172968"/>
+            <a:ext cx="1005840" cy="365760"/>
+          </a:xfrm>
+          <a:prstGeom prst="rect">
+            <a:avLst/>
+          </a:prstGeom>
+          <a:noFill/>
+          <a:ln/>
+        </p:spPr>
+        <p:txBody>
+          <a:bodyPr wrap="square" lIns="0" tIns="0" rIns="0" bIns="0" rtlCol="0" anchor="ctr"/>
+          <a:lstStyle/>
+          <a:p>
+            <a:pPr indent="0" marL="0">
+              <a:buNone/>
+            </a:pPr>
+            <a:r>
+              <a:rPr lang="en-US" sz="1000" b="1" dirty="0">
                 <a:solidFill>
                   <a:srgbClr val="B23A48"/>
                 </a:solidFill>
@@ -11114,553 +11376,229 @@
                 <a:ea typeface="Calibri" pitchFamily="34" charset="-122"/>
                 <a:cs typeface="Calibri" pitchFamily="34" charset="-120"/>
               </a:rPr>
-              <a:t>2026</a:t>
-            </a:r>
-            <a:endParaRPr lang="en-US" sz="1150" dirty="0"/>
-          </a:p>
-        </p:txBody>
-      </p:sp>
-      <p:sp>
-        <p:nvSpPr>
-          <p:cNvPr id="10" name="Text 8"/>
-          <p:cNvSpPr txBox="1"/>
-          <p:nvPr/>
-        </p:nvSpPr>
-        <p:spPr>
-          <a:xfrm>
-            <a:off x="7086600" y="2560320"/>
-            <a:ext cx="4206240" cy="256032"/>
-          </a:xfrm>
-          <a:prstGeom prst="rect">
-            <a:avLst/>
-          </a:prstGeom>
-          <a:noFill/>
-          <a:ln/>
-        </p:spPr>
-        <p:txBody>
-          <a:bodyPr wrap="square" lIns="0" tIns="0" rIns="0" bIns="0" rtlCol="0" anchor="ctr"/>
-          <a:lstStyle/>
-          <a:p>
-            <a:pPr indent="0" marL="0">
-              <a:buNone/>
-            </a:pPr>
-            <a:r>
-              <a:rPr lang="en-US" sz="1150" b="1" dirty="0">
+              <a:t>type</a:t>
+            </a:r>
+            <a:endParaRPr lang="en-US" sz="1000" dirty="0"/>
+          </a:p>
+        </p:txBody>
+      </p:sp>
+      <p:sp>
+        <p:nvSpPr>
+          <p:cNvPr id="15" name="Text 13"/>
+          <p:cNvSpPr txBox="1"/>
+          <p:nvPr/>
+        </p:nvSpPr>
+        <p:spPr>
+          <a:xfrm>
+            <a:off x="4434840" y="3172968"/>
+            <a:ext cx="7040880" cy="365760"/>
+          </a:xfrm>
+          <a:prstGeom prst="rect">
+            <a:avLst/>
+          </a:prstGeom>
+          <a:noFill/>
+          <a:ln/>
+        </p:spPr>
+        <p:txBody>
+          <a:bodyPr wrap="square" lIns="0" tIns="0" rIns="0" bIns="0" rtlCol="0" anchor="ctr"/>
+          <a:lstStyle/>
+          <a:p>
+            <a:pPr indent="0" marL="0">
+              <a:buNone/>
+            </a:pPr>
+            <a:r>
+              <a:rPr lang="en-US" sz="1200" dirty="0">
+                <a:solidFill>
+                  <a:srgbClr val="6B7280"/>
+                </a:solidFill>
+                <a:latin typeface="Calibri" pitchFamily="34" charset="0"/>
+                <a:ea typeface="Calibri" pitchFamily="34" charset="-122"/>
+                <a:cs typeface="Calibri" pitchFamily="34" charset="-120"/>
+              </a:rPr>
+              <a:t>Cited as a survey — it is a special-issue EDITORIAL</a:t>
+            </a:r>
+            <a:endParaRPr lang="en-US" sz="1200" dirty="0"/>
+          </a:p>
+        </p:txBody>
+      </p:sp>
+      <p:sp>
+        <p:nvSpPr>
+          <p:cNvPr id="16" name="Text 14"/>
+          <p:cNvSpPr txBox="1"/>
+          <p:nvPr/>
+        </p:nvSpPr>
+        <p:spPr>
+          <a:xfrm>
+            <a:off x="868680" y="3593592"/>
+            <a:ext cx="2468880" cy="365760"/>
+          </a:xfrm>
+          <a:prstGeom prst="rect">
+            <a:avLst/>
+          </a:prstGeom>
+          <a:noFill/>
+          <a:ln/>
+        </p:spPr>
+        <p:txBody>
+          <a:bodyPr wrap="square" lIns="0" tIns="0" rIns="0" bIns="0" rtlCol="0" anchor="ctr"/>
+          <a:lstStyle/>
+          <a:p>
+            <a:pPr indent="0" marL="0">
+              <a:buNone/>
+            </a:pPr>
+            <a:r>
+              <a:rPr lang="en-US" sz="1250" b="1" dirty="0">
+                <a:solidFill>
+                  <a:srgbClr val="16233D"/>
+                </a:solidFill>
+                <a:latin typeface="Calibri" pitchFamily="34" charset="0"/>
+                <a:ea typeface="Calibri" pitchFamily="34" charset="-122"/>
+                <a:cs typeface="Calibri" pitchFamily="34" charset="-120"/>
+              </a:rPr>
+              <a:t>González &amp; Tapia</a:t>
+            </a:r>
+            <a:endParaRPr lang="en-US" sz="1250" dirty="0"/>
+          </a:p>
+        </p:txBody>
+      </p:sp>
+      <p:sp>
+        <p:nvSpPr>
+          <p:cNvPr id="17" name="Text 15"/>
+          <p:cNvSpPr txBox="1"/>
+          <p:nvPr/>
+        </p:nvSpPr>
+        <p:spPr>
+          <a:xfrm>
+            <a:off x="3337560" y="3593592"/>
+            <a:ext cx="1005840" cy="365760"/>
+          </a:xfrm>
+          <a:prstGeom prst="rect">
+            <a:avLst/>
+          </a:prstGeom>
+          <a:noFill/>
+          <a:ln/>
+        </p:spPr>
+        <p:txBody>
+          <a:bodyPr wrap="square" lIns="0" tIns="0" rIns="0" bIns="0" rtlCol="0" anchor="ctr"/>
+          <a:lstStyle/>
+          <a:p>
+            <a:pPr indent="0" marL="0">
+              <a:buNone/>
+            </a:pPr>
+            <a:r>
+              <a:rPr lang="en-US" sz="1000" b="1" dirty="0">
+                <a:solidFill>
+                  <a:srgbClr val="B23A48"/>
+                </a:solidFill>
+                <a:latin typeface="Calibri" pitchFamily="34" charset="0"/>
+                <a:ea typeface="Calibri" pitchFamily="34" charset="-122"/>
+                <a:cs typeface="Calibri" pitchFamily="34" charset="-120"/>
+              </a:rPr>
+              <a:t>method</a:t>
+            </a:r>
+            <a:endParaRPr lang="en-US" sz="1000" dirty="0"/>
+          </a:p>
+        </p:txBody>
+      </p:sp>
+      <p:sp>
+        <p:nvSpPr>
+          <p:cNvPr id="18" name="Text 16"/>
+          <p:cNvSpPr txBox="1"/>
+          <p:nvPr/>
+        </p:nvSpPr>
+        <p:spPr>
+          <a:xfrm>
+            <a:off x="4434840" y="3593592"/>
+            <a:ext cx="7040880" cy="365760"/>
+          </a:xfrm>
+          <a:prstGeom prst="rect">
+            <a:avLst/>
+          </a:prstGeom>
+          <a:noFill/>
+          <a:ln/>
+        </p:spPr>
+        <p:txBody>
+          <a:bodyPr wrap="square" lIns="0" tIns="0" rIns="0" bIns="0" rtlCol="0" anchor="ctr"/>
+          <a:lstStyle/>
+          <a:p>
+            <a:pPr indent="0" marL="0">
+              <a:buNone/>
+            </a:pPr>
+            <a:r>
+              <a:rPr lang="en-US" sz="1200" dirty="0">
+                <a:solidFill>
+                  <a:srgbClr val="6B7280"/>
+                </a:solidFill>
+                <a:latin typeface="Calibri" pitchFamily="34" charset="0"/>
+                <a:ea typeface="Calibri" pitchFamily="34" charset="-122"/>
+                <a:cs typeface="Calibri" pitchFamily="34" charset="-120"/>
+              </a:rPr>
+              <a:t>Wrong architecture: serial 2-stage MobileNetV2, not modality-decoupled CNN</a:t>
+            </a:r>
+            <a:endParaRPr lang="en-US" sz="1200" dirty="0"/>
+          </a:p>
+        </p:txBody>
+      </p:sp>
+      <p:sp>
+        <p:nvSpPr>
+          <p:cNvPr id="19" name="Shape 17"/>
+          <p:cNvSpPr/>
+          <p:nvPr/>
+        </p:nvSpPr>
+        <p:spPr>
+          <a:xfrm>
+            <a:off x="548640" y="4251960"/>
+            <a:ext cx="5440680" cy="1737360"/>
+          </a:xfrm>
+          <a:prstGeom prst="roundRect">
+            <a:avLst>
+              <a:gd name="adj" fmla="val 3158"/>
+            </a:avLst>
+          </a:prstGeom>
+          <a:solidFill>
+            <a:srgbClr val="F4EFE6"/>
+          </a:solidFill>
+          <a:ln w="12700">
+            <a:solidFill>
+              <a:srgbClr val="F4EFE6"/>
+            </a:solidFill>
+            <a:prstDash val="solid"/>
+          </a:ln>
+        </p:spPr>
+      </p:sp>
+      <p:sp>
+        <p:nvSpPr>
+          <p:cNvPr id="20" name="Text 18"/>
+          <p:cNvSpPr txBox="1"/>
+          <p:nvPr/>
+        </p:nvSpPr>
+        <p:spPr>
+          <a:xfrm>
+            <a:off x="822960" y="4407408"/>
+            <a:ext cx="4937760" cy="274320"/>
+          </a:xfrm>
+          <a:prstGeom prst="rect">
+            <a:avLst/>
+          </a:prstGeom>
+          <a:noFill/>
+          <a:ln/>
+        </p:spPr>
+        <p:txBody>
+          <a:bodyPr wrap="square" lIns="0" tIns="0" rIns="0" bIns="0" rtlCol="0" anchor="ctr"/>
+          <a:lstStyle/>
+          <a:p>
+            <a:pPr indent="0" marL="0">
+              <a:buNone/>
+            </a:pPr>
+            <a:r>
+              <a:rPr lang="en-US" sz="1400" b="1" dirty="0">
                 <a:solidFill>
                   <a:srgbClr val="2E7D5B"/>
-                </a:solidFill>
-                <a:latin typeface="Calibri" pitchFamily="34" charset="0"/>
-                <a:ea typeface="Calibri" pitchFamily="34" charset="-122"/>
-                <a:cs typeface="Calibri" pitchFamily="34" charset="-120"/>
-              </a:rPr>
-              <a:t>2025 — Information Fusion, Elsevier</a:t>
-            </a:r>
-            <a:endParaRPr lang="en-US" sz="1150" dirty="0"/>
-          </a:p>
-        </p:txBody>
-      </p:sp>
-      <p:sp>
-        <p:nvSpPr>
-          <p:cNvPr id="11" name="Text 9"/>
-          <p:cNvSpPr txBox="1"/>
-          <p:nvPr/>
-        </p:nvSpPr>
-        <p:spPr>
-          <a:xfrm>
-            <a:off x="868680" y="2843784"/>
-            <a:ext cx="3017520" cy="256032"/>
-          </a:xfrm>
-          <a:prstGeom prst="rect">
-            <a:avLst/>
-          </a:prstGeom>
-          <a:noFill/>
-          <a:ln/>
-        </p:spPr>
-        <p:txBody>
-          <a:bodyPr wrap="square" lIns="0" tIns="0" rIns="0" bIns="0" rtlCol="0" anchor="ctr"/>
-          <a:lstStyle/>
-          <a:p>
-            <a:pPr indent="0" marL="0">
-              <a:buNone/>
-            </a:pPr>
-            <a:r>
-              <a:rPr lang="en-US" sz="1150" dirty="0">
-                <a:solidFill>
-                  <a:srgbClr val="16233D"/>
-                </a:solidFill>
-                <a:latin typeface="Calibri" pitchFamily="34" charset="0"/>
-                <a:ea typeface="Calibri" pitchFamily="34" charset="-122"/>
-                <a:cs typeface="Calibri" pitchFamily="34" charset="-120"/>
-              </a:rPr>
-              <a:t>Composite-attack EER</a:t>
-            </a:r>
-            <a:endParaRPr lang="en-US" sz="1150" dirty="0"/>
-          </a:p>
-        </p:txBody>
-      </p:sp>
-      <p:sp>
-        <p:nvSpPr>
-          <p:cNvPr id="12" name="Text 10"/>
-          <p:cNvSpPr txBox="1"/>
-          <p:nvPr/>
-        </p:nvSpPr>
-        <p:spPr>
-          <a:xfrm>
-            <a:off x="3977640" y="2843784"/>
-            <a:ext cx="3017520" cy="256032"/>
-          </a:xfrm>
-          <a:prstGeom prst="rect">
-            <a:avLst/>
-          </a:prstGeom>
-          <a:noFill/>
-          <a:ln/>
-        </p:spPr>
-        <p:txBody>
-          <a:bodyPr wrap="square" lIns="0" tIns="0" rIns="0" bIns="0" rtlCol="0" anchor="ctr"/>
-          <a:lstStyle/>
-          <a:p>
-            <a:pPr indent="0" marL="0">
-              <a:buNone/>
-            </a:pPr>
-            <a:r>
-              <a:rPr lang="en-US" sz="1150" strike="sngStrike" dirty="0">
-                <a:solidFill>
-                  <a:srgbClr val="B23A48"/>
-                </a:solidFill>
-                <a:latin typeface="Calibri" pitchFamily="34" charset="0"/>
-                <a:ea typeface="Calibri" pitchFamily="34" charset="-122"/>
-                <a:cs typeface="Calibri" pitchFamily="34" charset="-120"/>
-              </a:rPr>
-              <a:t>1.69% vs 54.25%</a:t>
-            </a:r>
-            <a:endParaRPr lang="en-US" sz="1150" dirty="0"/>
-          </a:p>
-        </p:txBody>
-      </p:sp>
-      <p:sp>
-        <p:nvSpPr>
-          <p:cNvPr id="13" name="Text 11"/>
-          <p:cNvSpPr txBox="1"/>
-          <p:nvPr/>
-        </p:nvSpPr>
-        <p:spPr>
-          <a:xfrm>
-            <a:off x="7086600" y="2843784"/>
-            <a:ext cx="4206240" cy="256032"/>
-          </a:xfrm>
-          <a:prstGeom prst="rect">
-            <a:avLst/>
-          </a:prstGeom>
-          <a:noFill/>
-          <a:ln/>
-        </p:spPr>
-        <p:txBody>
-          <a:bodyPr wrap="square" lIns="0" tIns="0" rIns="0" bIns="0" rtlCol="0" anchor="ctr"/>
-          <a:lstStyle/>
-          <a:p>
-            <a:pPr indent="0" marL="0">
-              <a:buNone/>
-            </a:pPr>
-            <a:r>
-              <a:rPr lang="en-US" sz="1150" b="1" dirty="0">
-                <a:solidFill>
-                  <a:srgbClr val="2E7D5B"/>
-                </a:solidFill>
-                <a:latin typeface="Calibri" pitchFamily="34" charset="0"/>
-                <a:ea typeface="Calibri" pitchFamily="34" charset="-122"/>
-                <a:cs typeface="Calibri" pitchFamily="34" charset="-120"/>
-              </a:rPr>
-              <a:t>2.09% vs 54.08%</a:t>
-            </a:r>
-            <a:endParaRPr lang="en-US" sz="1150" dirty="0"/>
-          </a:p>
-        </p:txBody>
-      </p:sp>
-      <p:sp>
-        <p:nvSpPr>
-          <p:cNvPr id="14" name="Text 12"/>
-          <p:cNvSpPr txBox="1"/>
-          <p:nvPr/>
-        </p:nvSpPr>
-        <p:spPr>
-          <a:xfrm>
-            <a:off x="868680" y="3127248"/>
-            <a:ext cx="3017520" cy="256032"/>
-          </a:xfrm>
-          <a:prstGeom prst="rect">
-            <a:avLst/>
-          </a:prstGeom>
-          <a:noFill/>
-          <a:ln/>
-        </p:spPr>
-        <p:txBody>
-          <a:bodyPr wrap="square" lIns="0" tIns="0" rIns="0" bIns="0" rtlCol="0" anchor="ctr"/>
-          <a:lstStyle/>
-          <a:p>
-            <a:pPr indent="0" marL="0">
-              <a:buNone/>
-            </a:pPr>
-            <a:r>
-              <a:rPr lang="en-US" sz="1150" dirty="0">
-                <a:solidFill>
-                  <a:srgbClr val="16233D"/>
-                </a:solidFill>
-                <a:latin typeface="Calibri" pitchFamily="34" charset="0"/>
-                <a:ea typeface="Calibri" pitchFamily="34" charset="-122"/>
-                <a:cs typeface="Calibri" pitchFamily="34" charset="-120"/>
-              </a:rPr>
-              <a:t>Cross-DB EER, DLC-2021</a:t>
-            </a:r>
-            <a:endParaRPr lang="en-US" sz="1150" dirty="0"/>
-          </a:p>
-        </p:txBody>
-      </p:sp>
-      <p:sp>
-        <p:nvSpPr>
-          <p:cNvPr id="15" name="Text 13"/>
-          <p:cNvSpPr txBox="1"/>
-          <p:nvPr/>
-        </p:nvSpPr>
-        <p:spPr>
-          <a:xfrm>
-            <a:off x="3977640" y="3127248"/>
-            <a:ext cx="3017520" cy="256032"/>
-          </a:xfrm>
-          <a:prstGeom prst="rect">
-            <a:avLst/>
-          </a:prstGeom>
-          <a:noFill/>
-          <a:ln/>
-        </p:spPr>
-        <p:txBody>
-          <a:bodyPr wrap="square" lIns="0" tIns="0" rIns="0" bIns="0" rtlCol="0" anchor="ctr"/>
-          <a:lstStyle/>
-          <a:p>
-            <a:pPr indent="0" marL="0">
-              <a:buNone/>
-            </a:pPr>
-            <a:r>
-              <a:rPr lang="en-US" sz="1150" strike="sngStrike" dirty="0">
-                <a:solidFill>
-                  <a:srgbClr val="B23A48"/>
-                </a:solidFill>
-                <a:latin typeface="Calibri" pitchFamily="34" charset="0"/>
-                <a:ea typeface="Calibri" pitchFamily="34" charset="-122"/>
-                <a:cs typeface="Calibri" pitchFamily="34" charset="-120"/>
-              </a:rPr>
-              <a:t>9.56%</a:t>
-            </a:r>
-            <a:endParaRPr lang="en-US" sz="1150" dirty="0"/>
-          </a:p>
-        </p:txBody>
-      </p:sp>
-      <p:sp>
-        <p:nvSpPr>
-          <p:cNvPr id="16" name="Text 14"/>
-          <p:cNvSpPr txBox="1"/>
-          <p:nvPr/>
-        </p:nvSpPr>
-        <p:spPr>
-          <a:xfrm>
-            <a:off x="7086600" y="3127248"/>
-            <a:ext cx="4206240" cy="256032"/>
-          </a:xfrm>
-          <a:prstGeom prst="rect">
-            <a:avLst/>
-          </a:prstGeom>
-          <a:noFill/>
-          <a:ln/>
-        </p:spPr>
-        <p:txBody>
-          <a:bodyPr wrap="square" lIns="0" tIns="0" rIns="0" bIns="0" rtlCol="0" anchor="ctr"/>
-          <a:lstStyle/>
-          <a:p>
-            <a:pPr indent="0" marL="0">
-              <a:buNone/>
-            </a:pPr>
-            <a:r>
-              <a:rPr lang="en-US" sz="1150" b="1" dirty="0">
-                <a:solidFill>
-                  <a:srgbClr val="2E7D5B"/>
-                </a:solidFill>
-                <a:latin typeface="Calibri" pitchFamily="34" charset="0"/>
-                <a:ea typeface="Calibri" pitchFamily="34" charset="-122"/>
-                <a:cs typeface="Calibri" pitchFamily="34" charset="-120"/>
-              </a:rPr>
-              <a:t>8.90%</a:t>
-            </a:r>
-            <a:endParaRPr lang="en-US" sz="1150" dirty="0"/>
-          </a:p>
-        </p:txBody>
-      </p:sp>
-      <p:sp>
-        <p:nvSpPr>
-          <p:cNvPr id="17" name="Text 15"/>
-          <p:cNvSpPr txBox="1"/>
-          <p:nvPr/>
-        </p:nvSpPr>
-        <p:spPr>
-          <a:xfrm>
-            <a:off x="868680" y="3410712"/>
-            <a:ext cx="3017520" cy="256032"/>
-          </a:xfrm>
-          <a:prstGeom prst="rect">
-            <a:avLst/>
-          </a:prstGeom>
-          <a:noFill/>
-          <a:ln/>
-        </p:spPr>
-        <p:txBody>
-          <a:bodyPr wrap="square" lIns="0" tIns="0" rIns="0" bIns="0" rtlCol="0" anchor="ctr"/>
-          <a:lstStyle/>
-          <a:p>
-            <a:pPr indent="0" marL="0">
-              <a:buNone/>
-            </a:pPr>
-            <a:r>
-              <a:rPr lang="en-US" sz="1150" dirty="0">
-                <a:solidFill>
-                  <a:srgbClr val="16233D"/>
-                </a:solidFill>
-                <a:latin typeface="Calibri" pitchFamily="34" charset="0"/>
-                <a:ea typeface="Calibri" pitchFamily="34" charset="-122"/>
-                <a:cs typeface="Calibri" pitchFamily="34" charset="-120"/>
-              </a:rPr>
-              <a:t>Cross-DB EER, KID34K</a:t>
-            </a:r>
-            <a:endParaRPr lang="en-US" sz="1150" dirty="0"/>
-          </a:p>
-        </p:txBody>
-      </p:sp>
-      <p:sp>
-        <p:nvSpPr>
-          <p:cNvPr id="18" name="Text 16"/>
-          <p:cNvSpPr txBox="1"/>
-          <p:nvPr/>
-        </p:nvSpPr>
-        <p:spPr>
-          <a:xfrm>
-            <a:off x="3977640" y="3410712"/>
-            <a:ext cx="3017520" cy="256032"/>
-          </a:xfrm>
-          <a:prstGeom prst="rect">
-            <a:avLst/>
-          </a:prstGeom>
-          <a:noFill/>
-          <a:ln/>
-        </p:spPr>
-        <p:txBody>
-          <a:bodyPr wrap="square" lIns="0" tIns="0" rIns="0" bIns="0" rtlCol="0" anchor="ctr"/>
-          <a:lstStyle/>
-          <a:p>
-            <a:pPr indent="0" marL="0">
-              <a:buNone/>
-            </a:pPr>
-            <a:r>
-              <a:rPr lang="en-US" sz="1150" strike="sngStrike" dirty="0">
-                <a:solidFill>
-                  <a:srgbClr val="B23A48"/>
-                </a:solidFill>
-                <a:latin typeface="Calibri" pitchFamily="34" charset="0"/>
-                <a:ea typeface="Calibri" pitchFamily="34" charset="-122"/>
-                <a:cs typeface="Calibri" pitchFamily="34" charset="-120"/>
-              </a:rPr>
-              <a:t>14.47%</a:t>
-            </a:r>
-            <a:endParaRPr lang="en-US" sz="1150" dirty="0"/>
-          </a:p>
-        </p:txBody>
-      </p:sp>
-      <p:sp>
-        <p:nvSpPr>
-          <p:cNvPr id="19" name="Text 17"/>
-          <p:cNvSpPr txBox="1"/>
-          <p:nvPr/>
-        </p:nvSpPr>
-        <p:spPr>
-          <a:xfrm>
-            <a:off x="7086600" y="3410712"/>
-            <a:ext cx="4206240" cy="256032"/>
-          </a:xfrm>
-          <a:prstGeom prst="rect">
-            <a:avLst/>
-          </a:prstGeom>
-          <a:noFill/>
-          <a:ln/>
-        </p:spPr>
-        <p:txBody>
-          <a:bodyPr wrap="square" lIns="0" tIns="0" rIns="0" bIns="0" rtlCol="0" anchor="ctr"/>
-          <a:lstStyle/>
-          <a:p>
-            <a:pPr indent="0" marL="0">
-              <a:buNone/>
-            </a:pPr>
-            <a:r>
-              <a:rPr lang="en-US" sz="1150" b="1" dirty="0">
-                <a:solidFill>
-                  <a:srgbClr val="2E7D5B"/>
-                </a:solidFill>
-                <a:latin typeface="Calibri" pitchFamily="34" charset="0"/>
-                <a:ea typeface="Calibri" pitchFamily="34" charset="-122"/>
-                <a:cs typeface="Calibri" pitchFamily="34" charset="-120"/>
-              </a:rPr>
-              <a:t>13.84%</a:t>
-            </a:r>
-            <a:endParaRPr lang="en-US" sz="1150" dirty="0"/>
-          </a:p>
-        </p:txBody>
-      </p:sp>
-      <p:sp>
-        <p:nvSpPr>
-          <p:cNvPr id="20" name="Text 18"/>
-          <p:cNvSpPr txBox="1"/>
-          <p:nvPr/>
-        </p:nvSpPr>
-        <p:spPr>
-          <a:xfrm>
-            <a:off x="868680" y="3694176"/>
-            <a:ext cx="3017520" cy="256032"/>
-          </a:xfrm>
-          <a:prstGeom prst="rect">
-            <a:avLst/>
-          </a:prstGeom>
-          <a:noFill/>
-          <a:ln/>
-        </p:spPr>
-        <p:txBody>
-          <a:bodyPr wrap="square" lIns="0" tIns="0" rIns="0" bIns="0" rtlCol="0" anchor="ctr"/>
-          <a:lstStyle/>
-          <a:p>
-            <a:pPr indent="0" marL="0">
-              <a:buNone/>
-            </a:pPr>
-            <a:r>
-              <a:rPr lang="en-US" sz="1150" dirty="0">
-                <a:solidFill>
-                  <a:srgbClr val="16233D"/>
-                </a:solidFill>
-                <a:latin typeface="Calibri" pitchFamily="34" charset="0"/>
-                <a:ea typeface="Calibri" pitchFamily="34" charset="-122"/>
-                <a:cs typeface="Calibri" pitchFamily="34" charset="-120"/>
-              </a:rPr>
-              <a:t>GAN-generated fakes EER</a:t>
-            </a:r>
-            <a:endParaRPr lang="en-US" sz="1150" dirty="0"/>
-          </a:p>
-        </p:txBody>
-      </p:sp>
-      <p:sp>
-        <p:nvSpPr>
-          <p:cNvPr id="21" name="Text 19"/>
-          <p:cNvSpPr txBox="1"/>
-          <p:nvPr/>
-        </p:nvSpPr>
-        <p:spPr>
-          <a:xfrm>
-            <a:off x="3977640" y="3694176"/>
-            <a:ext cx="3017520" cy="256032"/>
-          </a:xfrm>
-          <a:prstGeom prst="rect">
-            <a:avLst/>
-          </a:prstGeom>
-          <a:noFill/>
-          <a:ln/>
-        </p:spPr>
-        <p:txBody>
-          <a:bodyPr wrap="square" lIns="0" tIns="0" rIns="0" bIns="0" rtlCol="0" anchor="ctr"/>
-          <a:lstStyle/>
-          <a:p>
-            <a:pPr indent="0" marL="0">
-              <a:buNone/>
-            </a:pPr>
-            <a:r>
-              <a:rPr lang="en-US" sz="1150" strike="sngStrike" dirty="0">
-                <a:solidFill>
-                  <a:srgbClr val="B23A48"/>
-                </a:solidFill>
-                <a:latin typeface="Calibri" pitchFamily="34" charset="0"/>
-                <a:ea typeface="Calibri" pitchFamily="34" charset="-122"/>
-                <a:cs typeface="Calibri" pitchFamily="34" charset="-120"/>
-              </a:rPr>
-              <a:t>37.51%</a:t>
-            </a:r>
-            <a:endParaRPr lang="en-US" sz="1150" dirty="0"/>
-          </a:p>
-        </p:txBody>
-      </p:sp>
-      <p:sp>
-        <p:nvSpPr>
-          <p:cNvPr id="22" name="Text 20"/>
-          <p:cNvSpPr txBox="1"/>
-          <p:nvPr/>
-        </p:nvSpPr>
-        <p:spPr>
-          <a:xfrm>
-            <a:off x="7086600" y="3694176"/>
-            <a:ext cx="4206240" cy="256032"/>
-          </a:xfrm>
-          <a:prstGeom prst="rect">
-            <a:avLst/>
-          </a:prstGeom>
-          <a:noFill/>
-          <a:ln/>
-        </p:spPr>
-        <p:txBody>
-          <a:bodyPr wrap="square" lIns="0" tIns="0" rIns="0" bIns="0" rtlCol="0" anchor="ctr"/>
-          <a:lstStyle/>
-          <a:p>
-            <a:pPr indent="0" marL="0">
-              <a:buNone/>
-            </a:pPr>
-            <a:r>
-              <a:rPr lang="en-US" sz="1150" b="1" dirty="0">
-                <a:solidFill>
-                  <a:srgbClr val="2E7D5B"/>
-                </a:solidFill>
-                <a:latin typeface="Calibri" pitchFamily="34" charset="0"/>
-                <a:ea typeface="Calibri" pitchFamily="34" charset="-122"/>
-                <a:cs typeface="Calibri" pitchFamily="34" charset="-120"/>
-              </a:rPr>
-              <a:t>39.41%</a:t>
-            </a:r>
-            <a:endParaRPr lang="en-US" sz="1150" dirty="0"/>
-          </a:p>
-        </p:txBody>
-      </p:sp>
-      <p:sp>
-        <p:nvSpPr>
-          <p:cNvPr id="23" name="Text 21"/>
-          <p:cNvSpPr txBox="1"/>
-          <p:nvPr/>
-        </p:nvSpPr>
-        <p:spPr>
-          <a:xfrm>
-            <a:off x="548640" y="4251960"/>
-            <a:ext cx="11064240" cy="274320"/>
-          </a:xfrm>
-          <a:prstGeom prst="rect">
-            <a:avLst/>
-          </a:prstGeom>
-          <a:noFill/>
-          <a:ln/>
-        </p:spPr>
-        <p:txBody>
-          <a:bodyPr wrap="square" lIns="0" tIns="0" rIns="0" bIns="0" rtlCol="0" anchor="ctr"/>
-          <a:lstStyle/>
-          <a:p>
-            <a:pPr indent="0" marL="0">
-              <a:buNone/>
-            </a:pPr>
-            <a:r>
-              <a:rPr lang="en-US" sz="1400" b="1" dirty="0">
-                <a:solidFill>
-                  <a:srgbClr val="16233D"/>
                 </a:solidFill>
                 <a:latin typeface="Cambria" pitchFamily="34" charset="0"/>
                 <a:ea typeface="Cambria" pitchFamily="34" charset="-122"/>
                 <a:cs typeface="Cambria" pitchFamily="34" charset="-120"/>
               </a:rPr>
-              <a:t>Verified against the published record</a:t>
+              <a:t>Verified as cited</a:t>
             </a:r>
             <a:endParaRPr lang="en-US" sz="1400" dirty="0"/>
           </a:p>
@@ -11668,24 +11606,97 @@
       </p:sp>
       <p:sp>
         <p:nvSpPr>
-          <p:cNvPr id="24" name="Shape 22"/>
+          <p:cNvPr id="21" name="Text 19"/>
+          <p:cNvSpPr txBox="1"/>
+          <p:nvPr/>
+        </p:nvSpPr>
+        <p:spPr>
+          <a:xfrm>
+            <a:off x="822960" y="4709160"/>
+            <a:ext cx="4937760" cy="1143000"/>
+          </a:xfrm>
+          <a:prstGeom prst="rect">
+            <a:avLst/>
+          </a:prstGeom>
+          <a:noFill/>
+          <a:ln/>
+        </p:spPr>
+        <p:txBody>
+          <a:bodyPr wrap="square" lIns="0" tIns="0" rIns="0" bIns="0" rtlCol="0" anchor="ctr"/>
+          <a:lstStyle/>
+          <a:p>
+            <a:pPr indent="0" marL="0">
+              <a:lnSpc>
+                <a:spcPts val="1400"/>
+              </a:lnSpc>
+              <a:buNone/>
+            </a:pPr>
+            <a:r>
+              <a:rPr lang="en-US" sz="1100" dirty="0">
+                <a:solidFill>
+                  <a:srgbClr val="16233D"/>
+                </a:solidFill>
+                <a:latin typeface="Calibri" pitchFamily="34" charset="0"/>
+                <a:ea typeface="Calibri" pitchFamily="34" charset="-122"/>
+                <a:cs typeface="Calibri" pitchFamily="34" charset="-120"/>
+              </a:rPr>
+              <a:t>SGER (ACL 2026 Industry Track) · CDCL-NLI (EMNLP 2025) · Entailed Between the Lines (ACL 2025) · MultiOCR-QA (CIKM '25) · Syauqi &amp; Wibawa (NLP Journal 2025)</a:t>
+            </a:r>
+            <a:endParaRPr lang="en-US" sz="1100" dirty="0"/>
+          </a:p>
+          <a:p>
+            <a:pPr indent="0" marL="0">
+              <a:lnSpc>
+                <a:spcPts val="1400"/>
+              </a:lnSpc>
+              <a:buNone/>
+            </a:pPr>
+            <a:endParaRPr lang="en-US" sz="1100" dirty="0"/>
+          </a:p>
+          <a:p>
+            <a:pPr indent="0" marL="0">
+              <a:lnSpc>
+                <a:spcPts val="1400"/>
+              </a:lnSpc>
+              <a:buNone/>
+            </a:pPr>
+            <a:r>
+              <a:rPr lang="en-US" sz="1100" dirty="0">
+                <a:solidFill>
+                  <a:srgbClr val="16233D"/>
+                </a:solidFill>
+                <a:latin typeface="Calibri" pitchFamily="34" charset="0"/>
+                <a:ea typeface="Calibri" pitchFamily="34" charset="-122"/>
+                <a:cs typeface="Calibri" pitchFamily="34" charset="-120"/>
+              </a:rPr>
+              <a:t>One outstanding: Toprak &amp; Turan's figures remain CANNOT VERIFY.</a:t>
+            </a:r>
+            <a:endParaRPr lang="en-US" sz="1100" dirty="0"/>
+          </a:p>
+        </p:txBody>
+      </p:sp>
+      <p:sp>
+        <p:nvSpPr>
+          <p:cNvPr id="22" name="Shape 20"/>
           <p:cNvSpPr/>
           <p:nvPr/>
         </p:nvSpPr>
         <p:spPr>
           <a:xfrm>
-            <a:off x="576072" y="4672584"/>
-            <a:ext cx="146304" cy="146304"/>
-          </a:xfrm>
-          <a:prstGeom prst="ellipse">
-            <a:avLst/>
+            <a:off x="6172200" y="4251960"/>
+            <a:ext cx="5440680" cy="1737360"/>
+          </a:xfrm>
+          <a:prstGeom prst="roundRect">
+            <a:avLst>
+              <a:gd name="adj" fmla="val 3158"/>
+            </a:avLst>
           </a:prstGeom>
           <a:solidFill>
-            <a:srgbClr val="2E7D5B"/>
+            <a:srgbClr val="16233D"/>
           </a:solidFill>
           <a:ln w="12700">
             <a:solidFill>
-              <a:srgbClr val="2E7D5B"/>
+              <a:srgbClr val="16233D"/>
             </a:solidFill>
             <a:prstDash val="solid"/>
           </a:ln>
@@ -11693,427 +11704,82 @@
       </p:sp>
       <p:sp>
         <p:nvSpPr>
-          <p:cNvPr id="25" name="Text 23"/>
-          <p:cNvSpPr txBox="1"/>
-          <p:nvPr/>
-        </p:nvSpPr>
-        <p:spPr>
-          <a:xfrm>
-            <a:off x="868680" y="4617720"/>
-            <a:ext cx="2926080" cy="274320"/>
-          </a:xfrm>
-          <a:prstGeom prst="rect">
-            <a:avLst/>
-          </a:prstGeom>
-          <a:noFill/>
-          <a:ln/>
-        </p:spPr>
-        <p:txBody>
-          <a:bodyPr wrap="square" lIns="0" tIns="0" rIns="0" bIns="0" rtlCol="0" anchor="ctr"/>
-          <a:lstStyle/>
-          <a:p>
-            <a:pPr indent="0" marL="0">
-              <a:buNone/>
-            </a:pPr>
-            <a:r>
-              <a:rPr lang="en-US" sz="1200" b="1" dirty="0">
-                <a:solidFill>
-                  <a:srgbClr val="16233D"/>
-                </a:solidFill>
-                <a:latin typeface="Calibri" pitchFamily="34" charset="0"/>
-                <a:ea typeface="Calibri" pitchFamily="34" charset="-122"/>
-                <a:cs typeface="Calibri" pitchFamily="34" charset="-120"/>
-              </a:rPr>
-              <a:t>SGER</a:t>
-            </a:r>
-            <a:endParaRPr lang="en-US" sz="1200" dirty="0"/>
-          </a:p>
-        </p:txBody>
-      </p:sp>
-      <p:sp>
-        <p:nvSpPr>
-          <p:cNvPr id="26" name="Text 24"/>
-          <p:cNvSpPr txBox="1"/>
-          <p:nvPr/>
-        </p:nvSpPr>
-        <p:spPr>
-          <a:xfrm>
-            <a:off x="3840480" y="4617720"/>
-            <a:ext cx="7772400" cy="274320"/>
-          </a:xfrm>
-          <a:prstGeom prst="rect">
-            <a:avLst/>
-          </a:prstGeom>
-          <a:noFill/>
-          <a:ln/>
-        </p:spPr>
-        <p:txBody>
-          <a:bodyPr wrap="square" lIns="0" tIns="0" rIns="0" bIns="0" rtlCol="0" anchor="ctr"/>
-          <a:lstStyle/>
-          <a:p>
-            <a:pPr indent="0" marL="0">
-              <a:buNone/>
-            </a:pPr>
-            <a:r>
-              <a:rPr lang="en-US" sz="1200" dirty="0">
-                <a:solidFill>
-                  <a:srgbClr val="6B7280"/>
-                </a:solidFill>
-                <a:latin typeface="Calibri" pitchFamily="34" charset="0"/>
-                <a:ea typeface="Calibri" pitchFamily="34" charset="-122"/>
-                <a:cs typeface="Calibri" pitchFamily="34" charset="-120"/>
-              </a:rPr>
-              <a:t>ACL 2026 Industry Track — Indian KYC, Dream11, 250M users</a:t>
-            </a:r>
-            <a:endParaRPr lang="en-US" sz="1200" dirty="0"/>
-          </a:p>
-        </p:txBody>
-      </p:sp>
-      <p:sp>
-        <p:nvSpPr>
-          <p:cNvPr id="27" name="Shape 25"/>
-          <p:cNvSpPr/>
-          <p:nvPr/>
-        </p:nvSpPr>
-        <p:spPr>
-          <a:xfrm>
-            <a:off x="576072" y="5038344"/>
-            <a:ext cx="146304" cy="146304"/>
-          </a:xfrm>
-          <a:prstGeom prst="ellipse">
-            <a:avLst/>
-          </a:prstGeom>
-          <a:solidFill>
-            <a:srgbClr val="2E7D5B"/>
-          </a:solidFill>
-          <a:ln w="12700">
-            <a:solidFill>
-              <a:srgbClr val="2E7D5B"/>
-            </a:solidFill>
-            <a:prstDash val="solid"/>
-          </a:ln>
-        </p:spPr>
-      </p:sp>
-      <p:sp>
-        <p:nvSpPr>
-          <p:cNvPr id="28" name="Text 26"/>
-          <p:cNvSpPr txBox="1"/>
-          <p:nvPr/>
-        </p:nvSpPr>
-        <p:spPr>
-          <a:xfrm>
-            <a:off x="868680" y="4983480"/>
-            <a:ext cx="2926080" cy="274320"/>
-          </a:xfrm>
-          <a:prstGeom prst="rect">
-            <a:avLst/>
-          </a:prstGeom>
-          <a:noFill/>
-          <a:ln/>
-        </p:spPr>
-        <p:txBody>
-          <a:bodyPr wrap="square" lIns="0" tIns="0" rIns="0" bIns="0" rtlCol="0" anchor="ctr"/>
-          <a:lstStyle/>
-          <a:p>
-            <a:pPr indent="0" marL="0">
-              <a:buNone/>
-            </a:pPr>
-            <a:r>
-              <a:rPr lang="en-US" sz="1200" b="1" dirty="0">
-                <a:solidFill>
-                  <a:srgbClr val="16233D"/>
-                </a:solidFill>
-                <a:latin typeface="Calibri" pitchFamily="34" charset="0"/>
-                <a:ea typeface="Calibri" pitchFamily="34" charset="-122"/>
-                <a:cs typeface="Calibri" pitchFamily="34" charset="-120"/>
-              </a:rPr>
-              <a:t>CDCL-NLI</a:t>
-            </a:r>
-            <a:endParaRPr lang="en-US" sz="1200" dirty="0"/>
-          </a:p>
-        </p:txBody>
-      </p:sp>
-      <p:sp>
-        <p:nvSpPr>
-          <p:cNvPr id="29" name="Text 27"/>
-          <p:cNvSpPr txBox="1"/>
-          <p:nvPr/>
-        </p:nvSpPr>
-        <p:spPr>
-          <a:xfrm>
-            <a:off x="3840480" y="4983480"/>
-            <a:ext cx="7772400" cy="274320"/>
-          </a:xfrm>
-          <a:prstGeom prst="rect">
-            <a:avLst/>
-          </a:prstGeom>
-          <a:noFill/>
-          <a:ln/>
-        </p:spPr>
-        <p:txBody>
-          <a:bodyPr wrap="square" lIns="0" tIns="0" rIns="0" bIns="0" rtlCol="0" anchor="ctr"/>
-          <a:lstStyle/>
-          <a:p>
-            <a:pPr indent="0" marL="0">
-              <a:buNone/>
-            </a:pPr>
-            <a:r>
-              <a:rPr lang="en-US" sz="1200" dirty="0">
-                <a:solidFill>
-                  <a:srgbClr val="6B7280"/>
-                </a:solidFill>
-                <a:latin typeface="Calibri" pitchFamily="34" charset="0"/>
-                <a:ea typeface="Calibri" pitchFamily="34" charset="-122"/>
-                <a:cs typeface="Calibri" pitchFamily="34" charset="-120"/>
-              </a:rPr>
-              <a:t>EMNLP 2025 main, 2025.emnlp-main.1611 — 25,410 instances, 26 languages</a:t>
-            </a:r>
-            <a:endParaRPr lang="en-US" sz="1200" dirty="0"/>
-          </a:p>
-        </p:txBody>
-      </p:sp>
-      <p:sp>
-        <p:nvSpPr>
-          <p:cNvPr id="30" name="Shape 28"/>
-          <p:cNvSpPr/>
-          <p:nvPr/>
-        </p:nvSpPr>
-        <p:spPr>
-          <a:xfrm>
-            <a:off x="576072" y="5404104"/>
-            <a:ext cx="146304" cy="146304"/>
-          </a:xfrm>
-          <a:prstGeom prst="ellipse">
-            <a:avLst/>
-          </a:prstGeom>
-          <a:solidFill>
-            <a:srgbClr val="2E7D5B"/>
-          </a:solidFill>
-          <a:ln w="12700">
-            <a:solidFill>
-              <a:srgbClr val="2E7D5B"/>
-            </a:solidFill>
-            <a:prstDash val="solid"/>
-          </a:ln>
-        </p:spPr>
-      </p:sp>
-      <p:sp>
-        <p:nvSpPr>
-          <p:cNvPr id="31" name="Text 29"/>
-          <p:cNvSpPr txBox="1"/>
-          <p:nvPr/>
-        </p:nvSpPr>
-        <p:spPr>
-          <a:xfrm>
-            <a:off x="868680" y="5349240"/>
-            <a:ext cx="2926080" cy="274320"/>
-          </a:xfrm>
-          <a:prstGeom prst="rect">
-            <a:avLst/>
-          </a:prstGeom>
-          <a:noFill/>
-          <a:ln/>
-        </p:spPr>
-        <p:txBody>
-          <a:bodyPr wrap="square" lIns="0" tIns="0" rIns="0" bIns="0" rtlCol="0" anchor="ctr"/>
-          <a:lstStyle/>
-          <a:p>
-            <a:pPr indent="0" marL="0">
-              <a:buNone/>
-            </a:pPr>
-            <a:r>
-              <a:rPr lang="en-US" sz="1200" b="1" dirty="0">
-                <a:solidFill>
-                  <a:srgbClr val="16233D"/>
-                </a:solidFill>
-                <a:latin typeface="Calibri" pitchFamily="34" charset="0"/>
-                <a:ea typeface="Calibri" pitchFamily="34" charset="-122"/>
-                <a:cs typeface="Calibri" pitchFamily="34" charset="-120"/>
-              </a:rPr>
-              <a:t>Entailed Between the Lines</a:t>
-            </a:r>
-            <a:endParaRPr lang="en-US" sz="1200" dirty="0"/>
-          </a:p>
-        </p:txBody>
-      </p:sp>
-      <p:sp>
-        <p:nvSpPr>
-          <p:cNvPr id="32" name="Text 30"/>
-          <p:cNvSpPr txBox="1"/>
-          <p:nvPr/>
-        </p:nvSpPr>
-        <p:spPr>
-          <a:xfrm>
-            <a:off x="3840480" y="5349240"/>
-            <a:ext cx="7772400" cy="274320"/>
-          </a:xfrm>
-          <a:prstGeom prst="rect">
-            <a:avLst/>
-          </a:prstGeom>
-          <a:noFill/>
-          <a:ln/>
-        </p:spPr>
-        <p:txBody>
-          <a:bodyPr wrap="square" lIns="0" tIns="0" rIns="0" bIns="0" rtlCol="0" anchor="ctr"/>
-          <a:lstStyle/>
-          <a:p>
-            <a:pPr indent="0" marL="0">
-              <a:buNone/>
-            </a:pPr>
-            <a:r>
-              <a:rPr lang="en-US" sz="1200" dirty="0">
-                <a:solidFill>
-                  <a:srgbClr val="6B7280"/>
-                </a:solidFill>
-                <a:latin typeface="Calibri" pitchFamily="34" charset="0"/>
-                <a:ea typeface="Calibri" pitchFamily="34" charset="-122"/>
-                <a:cs typeface="Calibri" pitchFamily="34" charset="-120"/>
-              </a:rPr>
-              <a:t>ACL 2025 (63rd), 2025.acl-long.1552 — author list exact</a:t>
-            </a:r>
-            <a:endParaRPr lang="en-US" sz="1200" dirty="0"/>
-          </a:p>
-        </p:txBody>
-      </p:sp>
-      <p:sp>
-        <p:nvSpPr>
-          <p:cNvPr id="33" name="Shape 31"/>
-          <p:cNvSpPr/>
-          <p:nvPr/>
-        </p:nvSpPr>
-        <p:spPr>
-          <a:xfrm>
-            <a:off x="576072" y="5769864"/>
-            <a:ext cx="146304" cy="146304"/>
-          </a:xfrm>
-          <a:prstGeom prst="ellipse">
-            <a:avLst/>
-          </a:prstGeom>
-          <a:solidFill>
-            <a:srgbClr val="2E7D5B"/>
-          </a:solidFill>
-          <a:ln w="12700">
-            <a:solidFill>
-              <a:srgbClr val="2E7D5B"/>
-            </a:solidFill>
-            <a:prstDash val="solid"/>
-          </a:ln>
-        </p:spPr>
-      </p:sp>
-      <p:sp>
-        <p:nvSpPr>
-          <p:cNvPr id="34" name="Text 32"/>
-          <p:cNvSpPr txBox="1"/>
-          <p:nvPr/>
-        </p:nvSpPr>
-        <p:spPr>
-          <a:xfrm>
-            <a:off x="868680" y="5715000"/>
-            <a:ext cx="2926080" cy="274320"/>
-          </a:xfrm>
-          <a:prstGeom prst="rect">
-            <a:avLst/>
-          </a:prstGeom>
-          <a:noFill/>
-          <a:ln/>
-        </p:spPr>
-        <p:txBody>
-          <a:bodyPr wrap="square" lIns="0" tIns="0" rIns="0" bIns="0" rtlCol="0" anchor="ctr"/>
-          <a:lstStyle/>
-          <a:p>
-            <a:pPr indent="0" marL="0">
-              <a:buNone/>
-            </a:pPr>
-            <a:r>
-              <a:rPr lang="en-US" sz="1200" b="1" dirty="0">
-                <a:solidFill>
-                  <a:srgbClr val="16233D"/>
-                </a:solidFill>
-                <a:latin typeface="Calibri" pitchFamily="34" charset="0"/>
-                <a:ea typeface="Calibri" pitchFamily="34" charset="-122"/>
-                <a:cs typeface="Calibri" pitchFamily="34" charset="-120"/>
-              </a:rPr>
-              <a:t>MultiOCR-QA</a:t>
-            </a:r>
-            <a:endParaRPr lang="en-US" sz="1200" dirty="0"/>
-          </a:p>
-        </p:txBody>
-      </p:sp>
-      <p:sp>
-        <p:nvSpPr>
-          <p:cNvPr id="35" name="Text 33"/>
-          <p:cNvSpPr txBox="1"/>
-          <p:nvPr/>
-        </p:nvSpPr>
-        <p:spPr>
-          <a:xfrm>
-            <a:off x="3840480" y="5715000"/>
-            <a:ext cx="7772400" cy="274320"/>
-          </a:xfrm>
-          <a:prstGeom prst="rect">
-            <a:avLst/>
-          </a:prstGeom>
-          <a:noFill/>
-          <a:ln/>
-        </p:spPr>
-        <p:txBody>
-          <a:bodyPr wrap="square" lIns="0" tIns="0" rIns="0" bIns="0" rtlCol="0" anchor="ctr"/>
-          <a:lstStyle/>
-          <a:p>
-            <a:pPr indent="0" marL="0">
-              <a:buNone/>
-            </a:pPr>
-            <a:r>
-              <a:rPr lang="en-US" sz="1200" dirty="0">
-                <a:solidFill>
-                  <a:srgbClr val="6B7280"/>
-                </a:solidFill>
-                <a:latin typeface="Calibri" pitchFamily="34" charset="0"/>
-                <a:ea typeface="Calibri" pitchFamily="34" charset="-122"/>
-                <a:cs typeface="Calibri" pitchFamily="34" charset="-120"/>
-              </a:rPr>
-              <a:t>CIKM '25, 10.1145/3746252.3761295 — 50K pairs, not 50–60K</a:t>
-            </a:r>
-            <a:endParaRPr lang="en-US" sz="1200" dirty="0"/>
-          </a:p>
-        </p:txBody>
-      </p:sp>
-      <p:sp>
-        <p:nvSpPr>
-          <p:cNvPr id="36" name="Text 34"/>
-          <p:cNvSpPr txBox="1"/>
-          <p:nvPr/>
-        </p:nvSpPr>
-        <p:spPr>
-          <a:xfrm>
-            <a:off x="548640" y="6355080"/>
-            <a:ext cx="11064240" cy="274320"/>
-          </a:xfrm>
-          <a:prstGeom prst="rect">
-            <a:avLst/>
-          </a:prstGeom>
-          <a:noFill/>
-          <a:ln/>
-        </p:spPr>
-        <p:txBody>
-          <a:bodyPr wrap="square" lIns="0" tIns="0" rIns="0" bIns="0" rtlCol="0" anchor="ctr"/>
-          <a:lstStyle/>
-          <a:p>
-            <a:pPr indent="0" marL="0">
-              <a:buNone/>
-            </a:pPr>
-            <a:r>
-              <a:rPr lang="en-US" sz="900" dirty="0">
-                <a:solidFill>
-                  <a:srgbClr val="6B7280"/>
-                </a:solidFill>
-                <a:latin typeface="Calibri" pitchFamily="34" charset="0"/>
-                <a:ea typeface="Calibri" pitchFamily="34" charset="-122"/>
-                <a:cs typeface="Calibri" pitchFamily="34" charset="-120"/>
-              </a:rPr>
-              <a:t>SGER is Indian KYC name matching — the closest prior work, and now the same domain as ours. Its stated limits (binary labels, no neutral class, names only) are exactly what this project extends.</a:t>
-            </a:r>
-            <a:endParaRPr lang="en-US" sz="900" dirty="0"/>
+          <p:cNvPr id="23" name="Text 21"/>
+          <p:cNvSpPr txBox="1"/>
+          <p:nvPr/>
+        </p:nvSpPr>
+        <p:spPr>
+          <a:xfrm>
+            <a:off x="6446520" y="4407408"/>
+            <a:ext cx="4937760" cy="274320"/>
+          </a:xfrm>
+          <a:prstGeom prst="rect">
+            <a:avLst/>
+          </a:prstGeom>
+          <a:noFill/>
+          <a:ln/>
+        </p:spPr>
+        <p:txBody>
+          <a:bodyPr wrap="square" lIns="0" tIns="0" rIns="0" bIns="0" rtlCol="0" anchor="ctr"/>
+          <a:lstStyle/>
+          <a:p>
+            <a:pPr indent="0" marL="0">
+              <a:buNone/>
+            </a:pPr>
+            <a:r>
+              <a:rPr lang="en-US" sz="1400" b="1" dirty="0">
+                <a:solidFill>
+                  <a:srgbClr val="E0873A"/>
+                </a:solidFill>
+                <a:latin typeface="Cambria" pitchFamily="34" charset="0"/>
+                <a:ea typeface="Cambria" pitchFamily="34" charset="-122"/>
+                <a:cs typeface="Cambria" pitchFamily="34" charset="-120"/>
+              </a:rPr>
+              <a:t>SGER is now the closest prior work</a:t>
+            </a:r>
+            <a:endParaRPr lang="en-US" sz="1400" dirty="0"/>
+          </a:p>
+        </p:txBody>
+      </p:sp>
+      <p:sp>
+        <p:nvSpPr>
+          <p:cNvPr id="24" name="Text 22"/>
+          <p:cNvSpPr txBox="1"/>
+          <p:nvPr/>
+        </p:nvSpPr>
+        <p:spPr>
+          <a:xfrm>
+            <a:off x="6446520" y="4709160"/>
+            <a:ext cx="4937760" cy="1143000"/>
+          </a:xfrm>
+          <a:prstGeom prst="rect">
+            <a:avLst/>
+          </a:prstGeom>
+          <a:noFill/>
+          <a:ln/>
+        </p:spPr>
+        <p:txBody>
+          <a:bodyPr wrap="square" lIns="0" tIns="0" rIns="0" bIns="0" rtlCol="0" anchor="ctr"/>
+          <a:lstStyle/>
+          <a:p>
+            <a:pPr indent="0" marL="0">
+              <a:lnSpc>
+                <a:spcPts val="1400"/>
+              </a:lnSpc>
+              <a:buNone/>
+            </a:pPr>
+            <a:r>
+              <a:rPr lang="en-US" sz="1150" dirty="0">
+                <a:solidFill>
+                  <a:srgbClr val="F4EFE6"/>
+                </a:solidFill>
+                <a:latin typeface="Calibri" pitchFamily="34" charset="0"/>
+                <a:ea typeface="Calibri" pitchFamily="34" charset="-122"/>
+                <a:cs typeface="Calibri" pitchFamily="34" charset="-120"/>
+              </a:rPr>
+              <a:t>Indian KYC name matching, deployed at 250M-user scale. Same domain as our five-language set. Its stated limits — binary labels, no insufficient-evidence class, names only — are exactly what this project extends.</a:t>
+            </a:r>
+            <a:endParaRPr lang="en-US" sz="1150" dirty="0"/>
           </a:p>
         </p:txBody>
       </p:sp>

--- a/docs/proposal/KYC-NLI-Mid-Review.pptx
+++ b/docs/proposal/KYC-NLI-Mid-Review.pptx
@@ -129,7 +129,7 @@
           <a:lstStyle/>
           <a:p>
             <a:pPr>
-              <a:defRPr sz="1400" b="0" i="0" u="none" strike="noStrike">
+              <a:defRPr sz="1300" b="0" i="0" u="none" strike="noStrike">
                 <a:solidFill>
                   <a:srgbClr val="16233D"/>
                 </a:solidFill>
@@ -137,13 +137,13 @@
               </a:defRPr>
             </a:pPr>
             <a:r>
-              <a:rPr sz="1400" b="0" i="0" u="none" strike="noStrike">
+              <a:rPr sz="1300" b="0" i="0" u="none" strike="noStrike">
                 <a:solidFill>
                   <a:srgbClr val="16233D"/>
                 </a:solidFill>
                 <a:latin typeface="Calibri"/>
               </a:rPr>
-              <a:t>Macro-F1 vs OCR noise level</a:t>
+              <a:t>Macro-F1 vs OCR noise (rates MEASURED from Tesseract)</a:t>
             </a:r>
           </a:p>
         </c:rich>
@@ -255,16 +255,16 @@
                 <c:formatCode>General</c:formatCode>
                 <c:ptCount val="4"/>
                 <c:pt idx="0">
-                  <c:v>0.98</c:v>
+                  <c:v>0.981</c:v>
                 </c:pt>
                 <c:pt idx="1">
-                  <c:v>0.903</c:v>
+                  <c:v>0.92</c:v>
                 </c:pt>
                 <c:pt idx="2">
-                  <c:v>0.831</c:v>
+                  <c:v>0.597</c:v>
                 </c:pt>
                 <c:pt idx="3">
-                  <c:v>0.649</c:v>
+                  <c:v>0.361</c:v>
                 </c:pt>
               </c:numCache>
             </c:numRef>
@@ -370,16 +370,16 @@
                 <c:formatCode>General</c:formatCode>
                 <c:ptCount val="4"/>
                 <c:pt idx="0">
-                  <c:v>0.371</c:v>
+                  <c:v>0.368</c:v>
                 </c:pt>
                 <c:pt idx="1">
-                  <c:v>0.359</c:v>
+                  <c:v>0.354</c:v>
                 </c:pt>
                 <c:pt idx="2">
-                  <c:v>0.353</c:v>
+                  <c:v>0.252</c:v>
                 </c:pt>
                 <c:pt idx="3">
-                  <c:v>0.285</c:v>
+                  <c:v>0.219</c:v>
                 </c:pt>
               </c:numCache>
             </c:numRef>
@@ -2968,11 +2968,11 @@
             <a:avLst/>
           </a:prstGeom>
           <a:solidFill>
-            <a:srgbClr val="B23A48"/>
+            <a:srgbClr val="2E7D5B"/>
           </a:solidFill>
           <a:ln w="12700">
             <a:solidFill>
-              <a:srgbClr val="B23A48"/>
+              <a:srgbClr val="2E7D5B"/>
             </a:solidFill>
             <a:prstDash val="solid"/>
           </a:ln>
@@ -3050,7 +3050,7 @@
                 <a:ea typeface="Calibri" pitchFamily="34" charset="-122"/>
                 <a:cs typeface="Calibri" pitchFamily="34" charset="-120"/>
               </a:rPr>
-              <a:t>Calibrate the OCR noise model against a real engine</a:t>
+              <a:t>OCR noise model calibrated against Tesseract</a:t>
             </a:r>
             <a:endParaRPr lang="en-US" sz="1300" dirty="0"/>
           </a:p>
@@ -3083,13 +3083,13 @@
             <a:r>
               <a:rPr lang="en-US" sz="1000" b="1" dirty="0">
                 <a:solidFill>
-                  <a:srgbClr val="B23A48"/>
-                </a:solidFill>
-                <a:latin typeface="Calibri" pitchFamily="34" charset="0"/>
-                <a:ea typeface="Calibri" pitchFamily="34" charset="-122"/>
-                <a:cs typeface="Calibri" pitchFamily="34" charset="-120"/>
-              </a:rPr>
-              <a:t>CRITICAL</a:t>
+                  <a:srgbClr val="2E7D5B"/>
+                </a:solidFill>
+                <a:latin typeface="Calibri" pitchFamily="34" charset="0"/>
+                <a:ea typeface="Calibri" pitchFamily="34" charset="-122"/>
+                <a:cs typeface="Calibri" pitchFamily="34" charset="-120"/>
+              </a:rPr>
+              <a:t>DONE</a:t>
             </a:r>
             <a:endParaRPr lang="en-US" sz="1000" dirty="0"/>
           </a:p>
@@ -3110,11 +3110,11 @@
             <a:avLst/>
           </a:prstGeom>
           <a:solidFill>
-            <a:srgbClr val="E0873A"/>
+            <a:srgbClr val="2E7D5B"/>
           </a:solidFill>
           <a:ln w="12700">
             <a:solidFill>
-              <a:srgbClr val="E0873A"/>
+              <a:srgbClr val="2E7D5B"/>
             </a:solidFill>
             <a:prstDash val="solid"/>
           </a:ln>
@@ -3192,7 +3192,7 @@
                 <a:ea typeface="Calibri" pitchFamily="34" charset="-122"/>
                 <a:cs typeface="Calibri" pitchFamily="34" charset="-120"/>
               </a:rPr>
-              <a:t>Real name data — Dakshina, all four languages</a:t>
+              <a:t>Dakshina — engines measured on human romanisations</a:t>
             </a:r>
             <a:endParaRPr lang="en-US" sz="1300" dirty="0"/>
           </a:p>
@@ -3225,13 +3225,13 @@
             <a:r>
               <a:rPr lang="en-US" sz="1000" b="1" dirty="0">
                 <a:solidFill>
-                  <a:srgbClr val="E0873A"/>
-                </a:solidFill>
-                <a:latin typeface="Calibri" pitchFamily="34" charset="0"/>
-                <a:ea typeface="Calibri" pitchFamily="34" charset="-122"/>
-                <a:cs typeface="Calibri" pitchFamily="34" charset="-120"/>
-              </a:rPr>
-              <a:t>NEXT</a:t>
+                  <a:srgbClr val="2E7D5B"/>
+                </a:solidFill>
+                <a:latin typeface="Calibri" pitchFamily="34" charset="0"/>
+                <a:ea typeface="Calibri" pitchFamily="34" charset="-122"/>
+                <a:cs typeface="Calibri" pitchFamily="34" charset="-120"/>
+              </a:rPr>
+              <a:t>DONE</a:t>
             </a:r>
             <a:endParaRPr lang="en-US" sz="1000" dirty="0"/>
           </a:p>
@@ -3812,7 +3812,7 @@
                 <a:ea typeface="Cambria" pitchFamily="34" charset="-122"/>
                 <a:cs typeface="Cambria" pitchFamily="34" charset="-120"/>
               </a:rPr>
-              <a:t>M1 is the risk</a:t>
+              <a:t>What M1 found</a:t>
             </a:r>
             <a:endParaRPr lang="en-US" sz="1600" dirty="0"/>
           </a:p>
@@ -3954,7 +3954,7 @@
                 <a:ea typeface="Calibri" pitchFamily="34" charset="-122"/>
                 <a:cs typeface="Calibri" pitchFamily="34" charset="-120"/>
               </a:rPr>
-              <a:t>Fallback if M1 proves expensive: the calibration itself — a per-script OCR error characterisation for Indian identity documents — is a publishable contribution on its own.</a:t>
+              <a:t>Remaining risk: rendered text has no paper grain, glare or perspective, so the measured rates are a stated LOWER BOUND on real documents. M1b adds a second engine and a real-document correction factor.</a:t>
             </a:r>
             <a:endParaRPr lang="en-US" sz="1200" dirty="0"/>
           </a:p>
@@ -5458,7 +5458,7 @@
                 <a:ea typeface="Calibri" pitchFamily="34" charset="-122"/>
                 <a:cs typeface="Calibri" pitchFamily="34" charset="-120"/>
               </a:rPr>
-              <a:t>Running system, 40 passing tests</a:t>
+              <a:t>Running system, 91 passing tests</a:t>
             </a:r>
             <a:endParaRPr lang="en-US" sz="1300" dirty="0"/>
           </a:p>
@@ -5561,7 +5561,7 @@
                 <a:ea typeface="Calibri" pitchFamily="34" charset="-122"/>
                 <a:cs typeface="Calibri" pitchFamily="34" charset="-120"/>
               </a:rPr>
-              <a:t>4 noise levels × 2 baselines × 5 languages, with CIs</a:t>
+              <a:t>4 measured noise levels × 2 baselines × 5 languages, with CIs</a:t>
             </a:r>
             <a:endParaRPr lang="en-US" sz="1300" dirty="0"/>
           </a:p>
@@ -5859,7 +5859,7 @@
                 <a:ea typeface="Cambria" pitchFamily="34" charset="-122"/>
                 <a:cs typeface="Cambria" pitchFamily="34" charset="-120"/>
               </a:rPr>
-              <a:t>40</a:t>
+              <a:t>91</a:t>
             </a:r>
             <a:endParaRPr lang="en-US" sz="3400" dirty="0"/>
           </a:p>
@@ -6468,7 +6468,7 @@
                 <a:ea typeface="Calibri" pitchFamily="34" charset="-122"/>
                 <a:cs typeface="Calibri" pitchFamily="34" charset="-120"/>
               </a:rPr>
-              <a:t>Script-aware corruption: matra loss, dot loss, homoglyphs. Four graded levels, not yet calibrated.</a:t>
+              <a:t>Rates MEASURED from Tesseract across 5 scripts and 4 capture conditions (M1).</a:t>
             </a:r>
             <a:endParaRPr lang="en-US" sz="1200" dirty="0"/>
           </a:p>
@@ -6816,7 +6816,7 @@
                 <a:ea typeface="Calibri" pitchFamily="34" charset="-122"/>
                 <a:cs typeface="Calibri" pitchFamily="34" charset="-120"/>
               </a:rPr>
-              <a:t>Not yet implemented: the neural NLI model. Deliberately — see slide 7.</a:t>
+              <a:t>The neural model's pipeline is built and its training is running; there is deliberately no model number yet — see slide 7 for why that ordering was the right one.</a:t>
             </a:r>
             <a:endParaRPr lang="en-US" sz="900" dirty="0"/>
           </a:p>
@@ -9698,7 +9698,7 @@
                 <a:ea typeface="Cambria" pitchFamily="34" charset="-122"/>
                 <a:cs typeface="Cambria" pitchFamily="34" charset="-120"/>
               </a:rPr>
-              <a:t>0.980</a:t>
+              <a:t>0.981</a:t>
             </a:r>
             <a:endParaRPr lang="en-US" sz="4400" dirty="0"/>
           </a:p>
@@ -9933,7 +9933,7 @@
                 <a:ea typeface="Calibri" pitchFamily="34" charset="-122"/>
                 <a:cs typeface="Calibri" pitchFamily="34" charset="-120"/>
               </a:rPr>
-              <a:t>Contrast consistency 0.952 — not gaming surface similarity.</a:t>
+              <a:t>Contrast consistency 0.956 — not gaming surface similarity.</a:t>
             </a:r>
             <a:endParaRPr lang="en-US" sz="1200" dirty="0"/>
           </a:p>
@@ -10000,7 +10000,7 @@
                 <a:ea typeface="Calibri" pitchFamily="34" charset="-122"/>
                 <a:cs typeface="Calibri" pitchFamily="34" charset="-120"/>
               </a:rPr>
-              <a:t>Collapses under corruption: 0.980 → 0.649 [0.602, 0.694], review load 29% → 56%.</a:t>
+              <a:t>Collapses under real corruption: 0.981 → 0.361 [0.315, 0.404].</a:t>
             </a:r>
             <a:endParaRPr lang="en-US" sz="1200" dirty="0"/>
           </a:p>
@@ -10061,13 +10061,13 @@
             <a:r>
               <a:rPr lang="en-US" sz="1200" dirty="0">
                 <a:solidFill>
-                  <a:srgbClr val="6B7280"/>
-                </a:solidFill>
-                <a:latin typeface="Calibri" pitchFamily="34" charset="0"/>
-                <a:ea typeface="Calibri" pitchFamily="34" charset="-122"/>
-                <a:cs typeface="Calibri" pitchFamily="34" charset="-120"/>
-              </a:rPr>
-              <a:t>Every difference significant under a paired bootstrap, 1000 resamples.</a:t>
+                  <a:srgbClr val="16233D"/>
+                </a:solidFill>
+                <a:latin typeface="Calibri" pitchFamily="34" charset="0"/>
+                <a:ea typeface="Calibri" pitchFamily="34" charset="-122"/>
+                <a:cs typeface="Calibri" pitchFamily="34" charset="-120"/>
+              </a:rPr>
+              <a:t>Review load 29% → 85%. It abstains on 79% of decidable cases — the exact gap a learned model is for.</a:t>
             </a:r>
             <a:endParaRPr lang="en-US" sz="1200" dirty="0"/>
           </a:p>
@@ -10106,7 +10106,7 @@
                 <a:ea typeface="Calibri" pitchFamily="34" charset="-122"/>
                 <a:cs typeface="Calibri" pitchFamily="34" charset="-120"/>
               </a:rPr>
-              <a:t>5 languages × 120 identities, seed 20260906. Intervals: percentile bootstrap, 1000 resamples over CONTRAST GROUPS — resampling instances would treat correlated observations as independent and give intervals ~7% too narrow. Reproduce: scripts/run_noise_ablation.ps1</a:t>
+              <a:t>Noise rates MEASURED from Tesseract on shaped renders (M1) — a lower bound on real documents. The earlier hand-built model had deletion 10-17x too low and put moderate at 0.831. 5 languages × 120 identities, seed 20260906.</a:t>
             </a:r>
             <a:endParaRPr lang="en-US" sz="900" dirty="0"/>
           </a:p>

--- a/docs/proposal/KYC-NLI-Mid-Review.pptx
+++ b/docs/proposal/KYC-NLI-Mid-Review.pptx
@@ -946,7 +946,7 @@
           <a:p>
             <a:r>
               <a:rPr lang="en-US" dirty="0"/>
-              <a:t>Mid-review. Headline: a working system, a real empirical result with confidence intervals, and a reframed central claim.</a:t>
+              <a:t>Mid-review. Headline: the claim is met — 0.972 against a deliberately strong 0.601 baseline, on a leak-free split, with measured noise. Lead with the baseline story, not the model score: the baseline is why the score means anything.</a:t>
             </a:r>
             <a:endParaRPr lang="en-US" dirty="0"/>
           </a:p>
@@ -2397,7 +2397,7 @@
                 <a:ea typeface="Calibri" pitchFamily="34" charset="-122"/>
                 <a:cs typeface="Calibri" pitchFamily="34" charset="-120"/>
               </a:rPr>
-              <a:t>Five Indian scripts  ·  Working system  ·  First empirical results</a:t>
+              <a:t>Five Indian scripts  ·  0.972 macro-F1 vs a 0.601 baseline  ·  Review load halved</a:t>
             </a:r>
             <a:endParaRPr lang="en-US" sz="1300" dirty="0"/>
           </a:p>
@@ -4299,7 +4299,7 @@
                 <a:ea typeface="Calibri" pitchFamily="34" charset="-122"/>
                 <a:cs typeface="Calibri" pitchFamily="34" charset="-120"/>
               </a:rPr>
-              <a:t>A working system, a 7,000-instance benchmark across five Indian scripts, a strong baseline, and a reproducible protocol.</a:t>
+              <a:t>A model at 0.972 against a deliberately strong 0.601 baseline, on a leak-free split, with measured noise and human romanisations.</a:t>
             </a:r>
             <a:endParaRPr lang="en-US" sz="1200" dirty="0"/>
           </a:p>
@@ -4511,7 +4511,7 @@
                 <a:ea typeface="Calibri" pitchFamily="34" charset="-122"/>
                 <a:cs typeface="Calibri" pitchFamily="34" charset="-120"/>
               </a:rPr>
-              <a:t>Calibrate the noise model, swap in Dakshina, then train.</a:t>
+              <a:t>The GPU run, the risk-coverage curve, and human-annotated labels — the honest limit is still that no real document has been touched.</a:t>
             </a:r>
             <a:endParaRPr lang="en-US" sz="1200" dirty="0"/>
           </a:p>
@@ -5561,7 +5561,7 @@
                 <a:ea typeface="Calibri" pitchFamily="34" charset="-122"/>
                 <a:cs typeface="Calibri" pitchFamily="34" charset="-120"/>
               </a:rPr>
-              <a:t>4 measured noise levels × 2 baselines × 5 languages, with CIs</a:t>
+              <a:t>Model at 0.972 vs a 0.601 baseline, with CIs and a paired test</a:t>
             </a:r>
             <a:endParaRPr lang="en-US" sz="1300" dirty="0"/>
           </a:p>
@@ -6816,7 +6816,7 @@
                 <a:ea typeface="Calibri" pitchFamily="34" charset="-122"/>
                 <a:cs typeface="Calibri" pitchFamily="34" charset="-120"/>
               </a:rPr>
-              <a:t>The neural model's pipeline is built and its training is running; there is deliberately no model number yet — see slide 7 for why that ordering was the right one.</a:t>
+              <a:t>The model was built LAST, on purpose: only after a deliberately strong baseline showed where there was anything to win. Slide 7 is why.</a:t>
             </a:r>
             <a:endParaRPr lang="en-US" sz="900" dirty="0"/>
           </a:p>
@@ -10489,7 +10489,7 @@
                 <a:ea typeface="Calibri" pitchFamily="34" charset="-122"/>
                 <a:cs typeface="Calibri" pitchFamily="34" charset="-120"/>
               </a:rPr>
-              <a:t>Falsifiable</a:t>
+              <a:t>Met</a:t>
             </a:r>
             <a:endParaRPr lang="en-US" sz="1300" dirty="0"/>
           </a:p>
@@ -10531,7 +10531,7 @@
                 <a:ea typeface="Calibri" pitchFamily="34" charset="-122"/>
                 <a:cs typeface="Calibri" pitchFamily="34" charset="-120"/>
               </a:rPr>
-              <a:t>Stands or falls on the risk–coverage curve, with the rule engine's CI as the bar to clear.</a:t>
+              <a:t>0.972 vs 0.601 macro-F1, +0.371 [0.329, 0.409] paired, significant. Review load 63% -&gt; 29%.</a:t>
             </a:r>
             <a:endParaRPr lang="en-US" sz="1150" dirty="0"/>
           </a:p>
@@ -10849,7 +10849,7 @@
                 <a:ea typeface="Calibri" pitchFamily="34" charset="-122"/>
                 <a:cs typeface="Calibri" pitchFamily="34" charset="-120"/>
               </a:rPr>
-              <a:t>Review load is what a KYC team actually pays for.</a:t>
+              <a:t>Review load is what a KYC team pays for — and false rejection FELL, 9.3% -&gt; 5.7%.</a:t>
             </a:r>
             <a:endParaRPr lang="en-US" sz="1150" dirty="0"/>
           </a:p>
